--- a/LC UNIX/07 Regular Expressions.pptx
+++ b/LC UNIX/07 Regular Expressions.pptx
@@ -251,7 +251,7 @@
 <file path=ppt/revisionInfo.xml><?xml version="1.0" encoding="utf-8"?>
 <p1510:revInfo xmlns:a="http://schemas.openxmlformats.org/drawingml/2006/main" xmlns:r="http://schemas.openxmlformats.org/officeDocument/2006/relationships" xmlns:p1510="http://schemas.microsoft.com/office/powerpoint/2015/10/main">
   <p1510:revLst>
-    <p1510:client id="{3B300D2A-DB27-F24E-AB9D-19CEF98A9EAE}" v="2" dt="2025-03-28T09:39:31.527"/>
+    <p1510:client id="{8E32933D-EE68-DB44-892B-73EFEAB72A24}" v="1" dt="2026-03-12T05:58:55.615"/>
   </p1510:revLst>
 </p1510:revInfo>
 </file>
@@ -259,210 +259,72 @@
 <file path=ppt/changesInfos/changesInfo1.xml><?xml version="1.0" encoding="utf-8"?>
 <pc:chgInfo xmlns:a="http://schemas.openxmlformats.org/drawingml/2006/main" xmlns:r="http://schemas.openxmlformats.org/officeDocument/2006/relationships" xmlns:ac="http://schemas.microsoft.com/office/drawing/2013/main/command" xmlns:pc="http://schemas.microsoft.com/office/powerpoint/2013/main/command">
   <pc:docChgLst>
-    <pc:chgData name="Baráth, Július" userId="aebde9b9-dccc-4475-a9ac-c05e78323d7a" providerId="ADAL" clId="{3B300D2A-DB27-F24E-AB9D-19CEF98A9EAE}"/>
+    <pc:chgData name="Baráth, Július" userId="aebde9b9-dccc-4475-a9ac-c05e78323d7a" providerId="ADAL" clId="{4A0811C8-ED2F-505E-B787-C8270CED5046}"/>
     <pc:docChg chg="custSel modSld">
-      <pc:chgData name="Baráth, Július" userId="aebde9b9-dccc-4475-a9ac-c05e78323d7a" providerId="ADAL" clId="{3B300D2A-DB27-F24E-AB9D-19CEF98A9EAE}" dt="2025-03-28T09:39:37.762" v="23" actId="1076"/>
+      <pc:chgData name="Baráth, Július" userId="aebde9b9-dccc-4475-a9ac-c05e78323d7a" providerId="ADAL" clId="{4A0811C8-ED2F-505E-B787-C8270CED5046}" dt="2026-03-12T06:06:47.435" v="22" actId="20577"/>
       <pc:docMkLst>
         <pc:docMk/>
       </pc:docMkLst>
-      <pc:sldChg chg="addSp modSp mod">
-        <pc:chgData name="Baráth, Július" userId="aebde9b9-dccc-4475-a9ac-c05e78323d7a" providerId="ADAL" clId="{3B300D2A-DB27-F24E-AB9D-19CEF98A9EAE}" dt="2025-03-28T09:28:06.495" v="17" actId="108"/>
+      <pc:sldChg chg="modSp mod">
+        <pc:chgData name="Baráth, Július" userId="aebde9b9-dccc-4475-a9ac-c05e78323d7a" providerId="ADAL" clId="{4A0811C8-ED2F-505E-B787-C8270CED5046}" dt="2026-03-11T13:44:22.243" v="0" actId="6549"/>
         <pc:sldMkLst>
           <pc:docMk/>
-          <pc:sldMk cId="0" sldId="260"/>
+          <pc:sldMk cId="0" sldId="261"/>
         </pc:sldMkLst>
-        <pc:spChg chg="add mod">
-          <ac:chgData name="Baráth, Július" userId="aebde9b9-dccc-4475-a9ac-c05e78323d7a" providerId="ADAL" clId="{3B300D2A-DB27-F24E-AB9D-19CEF98A9EAE}" dt="2025-03-28T09:28:06.495" v="17" actId="108"/>
+        <pc:spChg chg="mod">
+          <ac:chgData name="Baráth, Július" userId="aebde9b9-dccc-4475-a9ac-c05e78323d7a" providerId="ADAL" clId="{4A0811C8-ED2F-505E-B787-C8270CED5046}" dt="2026-03-11T13:44:22.243" v="0" actId="6549"/>
           <ac:spMkLst>
             <pc:docMk/>
-            <pc:sldMk cId="0" sldId="260"/>
-            <ac:spMk id="2" creationId="{29EDA87E-A9F2-089F-8092-74CF08084319}"/>
+            <pc:sldMk cId="0" sldId="261"/>
+            <ac:spMk id="54" creationId="{00000000-0000-0000-0000-000000000000}"/>
           </ac:spMkLst>
         </pc:spChg>
       </pc:sldChg>
-      <pc:sldChg chg="addSp delSp modSp mod">
-        <pc:chgData name="Baráth, Július" userId="aebde9b9-dccc-4475-a9ac-c05e78323d7a" providerId="ADAL" clId="{3B300D2A-DB27-F24E-AB9D-19CEF98A9EAE}" dt="2025-03-28T09:39:37.762" v="23" actId="1076"/>
+      <pc:sldChg chg="modSp mod">
+        <pc:chgData name="Baráth, Július" userId="aebde9b9-dccc-4475-a9ac-c05e78323d7a" providerId="ADAL" clId="{4A0811C8-ED2F-505E-B787-C8270CED5046}" dt="2026-03-12T05:59:34.986" v="11" actId="207"/>
+        <pc:sldMkLst>
+          <pc:docMk/>
+          <pc:sldMk cId="0" sldId="270"/>
+        </pc:sldMkLst>
+        <pc:spChg chg="mod">
+          <ac:chgData name="Baráth, Július" userId="aebde9b9-dccc-4475-a9ac-c05e78323d7a" providerId="ADAL" clId="{4A0811C8-ED2F-505E-B787-C8270CED5046}" dt="2026-03-12T05:59:34.986" v="11" actId="207"/>
+          <ac:spMkLst>
+            <pc:docMk/>
+            <pc:sldMk cId="0" sldId="270"/>
+            <ac:spMk id="117" creationId="{00000000-0000-0000-0000-000000000000}"/>
+          </ac:spMkLst>
+        </pc:spChg>
+      </pc:sldChg>
+      <pc:sldChg chg="modSp mod">
+        <pc:chgData name="Baráth, Július" userId="aebde9b9-dccc-4475-a9ac-c05e78323d7a" providerId="ADAL" clId="{4A0811C8-ED2F-505E-B787-C8270CED5046}" dt="2026-03-12T06:06:47.435" v="22" actId="20577"/>
         <pc:sldMkLst>
           <pc:docMk/>
           <pc:sldMk cId="2299823048" sldId="275"/>
         </pc:sldMkLst>
-        <pc:picChg chg="del">
-          <ac:chgData name="Baráth, Július" userId="aebde9b9-dccc-4475-a9ac-c05e78323d7a" providerId="ADAL" clId="{3B300D2A-DB27-F24E-AB9D-19CEF98A9EAE}" dt="2025-03-28T09:39:04.237" v="19" actId="478"/>
-          <ac:picMkLst>
+        <pc:spChg chg="mod">
+          <ac:chgData name="Baráth, Július" userId="aebde9b9-dccc-4475-a9ac-c05e78323d7a" providerId="ADAL" clId="{4A0811C8-ED2F-505E-B787-C8270CED5046}" dt="2026-03-12T06:06:41.103" v="20" actId="20577"/>
+          <ac:spMkLst>
             <pc:docMk/>
             <pc:sldMk cId="2299823048" sldId="275"/>
-            <ac:picMk id="4" creationId="{1628CD97-203B-DB33-6961-9A160BDB3681}"/>
-          </ac:picMkLst>
-        </pc:picChg>
-        <pc:picChg chg="add mod">
-          <ac:chgData name="Baráth, Július" userId="aebde9b9-dccc-4475-a9ac-c05e78323d7a" providerId="ADAL" clId="{3B300D2A-DB27-F24E-AB9D-19CEF98A9EAE}" dt="2025-03-28T09:39:37.762" v="23" actId="1076"/>
+            <ac:spMk id="3" creationId="{6D8FAB66-205C-93C0-C547-0814BCD352C2}"/>
+          </ac:spMkLst>
+        </pc:spChg>
+        <pc:spChg chg="mod">
+          <ac:chgData name="Baráth, Július" userId="aebde9b9-dccc-4475-a9ac-c05e78323d7a" providerId="ADAL" clId="{4A0811C8-ED2F-505E-B787-C8270CED5046}" dt="2026-03-12T06:06:47.435" v="22" actId="20577"/>
+          <ac:spMkLst>
+            <pc:docMk/>
+            <pc:sldMk cId="2299823048" sldId="275"/>
+            <ac:spMk id="5" creationId="{ADE6F42E-3830-A463-1DC5-8FDDE0AB6F28}"/>
+          </ac:spMkLst>
+        </pc:spChg>
+        <pc:picChg chg="mod">
+          <ac:chgData name="Baráth, Július" userId="aebde9b9-dccc-4475-a9ac-c05e78323d7a" providerId="ADAL" clId="{4A0811C8-ED2F-505E-B787-C8270CED5046}" dt="2026-03-12T06:06:28.946" v="13" actId="1076"/>
           <ac:picMkLst>
             <pc:docMk/>
             <pc:sldMk cId="2299823048" sldId="275"/>
             <ac:picMk id="7" creationId="{C2E1F55B-6F50-7370-FB8B-82B516B737FA}"/>
           </ac:picMkLst>
         </pc:picChg>
-      </pc:sldChg>
-      <pc:sldChg chg="modSp mod">
-        <pc:chgData name="Baráth, Július" userId="aebde9b9-dccc-4475-a9ac-c05e78323d7a" providerId="ADAL" clId="{3B300D2A-DB27-F24E-AB9D-19CEF98A9EAE}" dt="2025-03-28T09:33:09.240" v="18" actId="1036"/>
-        <pc:sldMkLst>
-          <pc:docMk/>
-          <pc:sldMk cId="2710056737" sldId="276"/>
-        </pc:sldMkLst>
-        <pc:picChg chg="mod">
-          <ac:chgData name="Baráth, Július" userId="aebde9b9-dccc-4475-a9ac-c05e78323d7a" providerId="ADAL" clId="{3B300D2A-DB27-F24E-AB9D-19CEF98A9EAE}" dt="2025-03-28T09:33:09.240" v="18" actId="1036"/>
-          <ac:picMkLst>
-            <pc:docMk/>
-            <pc:sldMk cId="2710056737" sldId="276"/>
-            <ac:picMk id="2" creationId="{0C5BF01C-44B1-5736-33C1-2CAEC6C8BA18}"/>
-          </ac:picMkLst>
-        </pc:picChg>
-      </pc:sldChg>
-    </pc:docChg>
-  </pc:docChgLst>
-  <pc:docChgLst>
-    <pc:chgData name="Baráth, Július" userId="S::julius.barath@aos.sk::aebde9b9-dccc-4475-a9ac-c05e78323d7a" providerId="AD" clId="Web-{3F7218D1-D12A-564E-ECCF-9B2DFFF77BDB}"/>
-    <pc:docChg chg="delSld modSld">
-      <pc:chgData name="Baráth, Július" userId="S::julius.barath@aos.sk::aebde9b9-dccc-4475-a9ac-c05e78323d7a" providerId="AD" clId="Web-{3F7218D1-D12A-564E-ECCF-9B2DFFF77BDB}" dt="2023-12-18T14:20:00.379" v="132" actId="20577"/>
-      <pc:docMkLst>
-        <pc:docMk/>
-      </pc:docMkLst>
-      <pc:sldChg chg="modSp">
-        <pc:chgData name="Baráth, Július" userId="S::julius.barath@aos.sk::aebde9b9-dccc-4475-a9ac-c05e78323d7a" providerId="AD" clId="Web-{3F7218D1-D12A-564E-ECCF-9B2DFFF77BDB}" dt="2023-12-18T13:21:25.035" v="25" actId="20577"/>
-        <pc:sldMkLst>
-          <pc:docMk/>
-          <pc:sldMk cId="0" sldId="258"/>
-        </pc:sldMkLst>
-      </pc:sldChg>
-      <pc:sldChg chg="modSp">
-        <pc:chgData name="Baráth, Július" userId="S::julius.barath@aos.sk::aebde9b9-dccc-4475-a9ac-c05e78323d7a" providerId="AD" clId="Web-{3F7218D1-D12A-564E-ECCF-9B2DFFF77BDB}" dt="2023-12-18T13:32:38.338" v="104" actId="20577"/>
-        <pc:sldMkLst>
-          <pc:docMk/>
-          <pc:sldMk cId="0" sldId="261"/>
-        </pc:sldMkLst>
-      </pc:sldChg>
-      <pc:sldChg chg="del">
-        <pc:chgData name="Baráth, Július" userId="S::julius.barath@aos.sk::aebde9b9-dccc-4475-a9ac-c05e78323d7a" providerId="AD" clId="Web-{3F7218D1-D12A-564E-ECCF-9B2DFFF77BDB}" dt="2023-12-18T14:03:41.418" v="105"/>
-        <pc:sldMkLst>
-          <pc:docMk/>
-          <pc:sldMk cId="0" sldId="264"/>
-        </pc:sldMkLst>
-      </pc:sldChg>
-      <pc:sldChg chg="del">
-        <pc:chgData name="Baráth, Július" userId="S::julius.barath@aos.sk::aebde9b9-dccc-4475-a9ac-c05e78323d7a" providerId="AD" clId="Web-{3F7218D1-D12A-564E-ECCF-9B2DFFF77BDB}" dt="2023-12-18T14:03:48.200" v="106"/>
-        <pc:sldMkLst>
-          <pc:docMk/>
-          <pc:sldMk cId="0" sldId="265"/>
-        </pc:sldMkLst>
-      </pc:sldChg>
-      <pc:sldChg chg="modSp">
-        <pc:chgData name="Baráth, Július" userId="S::julius.barath@aos.sk::aebde9b9-dccc-4475-a9ac-c05e78323d7a" providerId="AD" clId="Web-{3F7218D1-D12A-564E-ECCF-9B2DFFF77BDB}" dt="2023-12-18T14:10:02.255" v="111" actId="20577"/>
-        <pc:sldMkLst>
-          <pc:docMk/>
-          <pc:sldMk cId="0" sldId="268"/>
-        </pc:sldMkLst>
-      </pc:sldChg>
-      <pc:sldChg chg="modSp">
-        <pc:chgData name="Baráth, Július" userId="S::julius.barath@aos.sk::aebde9b9-dccc-4475-a9ac-c05e78323d7a" providerId="AD" clId="Web-{3F7218D1-D12A-564E-ECCF-9B2DFFF77BDB}" dt="2023-12-18T14:15:24.497" v="116" actId="20577"/>
-        <pc:sldMkLst>
-          <pc:docMk/>
-          <pc:sldMk cId="0" sldId="270"/>
-        </pc:sldMkLst>
-      </pc:sldChg>
-      <pc:sldChg chg="modSp">
-        <pc:chgData name="Baráth, Július" userId="S::julius.barath@aos.sk::aebde9b9-dccc-4475-a9ac-c05e78323d7a" providerId="AD" clId="Web-{3F7218D1-D12A-564E-ECCF-9B2DFFF77BDB}" dt="2023-12-18T14:20:00.379" v="132" actId="20577"/>
-        <pc:sldMkLst>
-          <pc:docMk/>
-          <pc:sldMk cId="0" sldId="274"/>
-        </pc:sldMkLst>
-      </pc:sldChg>
-    </pc:docChg>
-  </pc:docChgLst>
-  <pc:docChgLst>
-    <pc:chgData name="Baráth, Július" userId="S::julius.barath@aos.sk::aebde9b9-dccc-4475-a9ac-c05e78323d7a" providerId="AD" clId="Web-{76654120-DB18-A2CA-6924-B5895668B57D}"/>
-    <pc:docChg chg="addSld delSld modSld">
-      <pc:chgData name="Baráth, Július" userId="S::julius.barath@aos.sk::aebde9b9-dccc-4475-a9ac-c05e78323d7a" providerId="AD" clId="Web-{76654120-DB18-A2CA-6924-B5895668B57D}" dt="2023-12-18T17:39:30.885" v="156" actId="1076"/>
-      <pc:docMkLst>
-        <pc:docMk/>
-      </pc:docMkLst>
-      <pc:sldChg chg="modSp">
-        <pc:chgData name="Baráth, Július" userId="S::julius.barath@aos.sk::aebde9b9-dccc-4475-a9ac-c05e78323d7a" providerId="AD" clId="Web-{76654120-DB18-A2CA-6924-B5895668B57D}" dt="2023-12-18T17:34:49.749" v="136" actId="20577"/>
-        <pc:sldMkLst>
-          <pc:docMk/>
-          <pc:sldMk cId="0" sldId="268"/>
-        </pc:sldMkLst>
-      </pc:sldChg>
-      <pc:sldChg chg="addSp delSp modSp mod modClrScheme chgLayout">
-        <pc:chgData name="Baráth, Július" userId="S::julius.barath@aos.sk::aebde9b9-dccc-4475-a9ac-c05e78323d7a" providerId="AD" clId="Web-{76654120-DB18-A2CA-6924-B5895668B57D}" dt="2023-12-18T16:48:58.114" v="1"/>
-        <pc:sldMkLst>
-          <pc:docMk/>
-          <pc:sldMk cId="0" sldId="272"/>
-        </pc:sldMkLst>
-      </pc:sldChg>
-      <pc:sldChg chg="del">
-        <pc:chgData name="Baráth, Július" userId="S::julius.barath@aos.sk::aebde9b9-dccc-4475-a9ac-c05e78323d7a" providerId="AD" clId="Web-{76654120-DB18-A2CA-6924-B5895668B57D}" dt="2023-12-18T17:01:13.423" v="48"/>
-        <pc:sldMkLst>
-          <pc:docMk/>
-          <pc:sldMk cId="0" sldId="273"/>
-        </pc:sldMkLst>
-      </pc:sldChg>
-      <pc:sldChg chg="modSp">
-        <pc:chgData name="Baráth, Július" userId="S::julius.barath@aos.sk::aebde9b9-dccc-4475-a9ac-c05e78323d7a" providerId="AD" clId="Web-{76654120-DB18-A2CA-6924-B5895668B57D}" dt="2023-12-18T17:22:56.269" v="119" actId="20577"/>
-        <pc:sldMkLst>
-          <pc:docMk/>
-          <pc:sldMk cId="0" sldId="274"/>
-        </pc:sldMkLst>
-      </pc:sldChg>
-      <pc:sldChg chg="addSp modSp new">
-        <pc:chgData name="Baráth, Július" userId="S::julius.barath@aos.sk::aebde9b9-dccc-4475-a9ac-c05e78323d7a" providerId="AD" clId="Web-{76654120-DB18-A2CA-6924-B5895668B57D}" dt="2023-12-18T17:18:44.744" v="110" actId="14100"/>
-        <pc:sldMkLst>
-          <pc:docMk/>
-          <pc:sldMk cId="2299823048" sldId="275"/>
-        </pc:sldMkLst>
-      </pc:sldChg>
-      <pc:sldChg chg="addSp delSp modSp new mod modClrScheme chgLayout">
-        <pc:chgData name="Baráth, Július" userId="S::julius.barath@aos.sk::aebde9b9-dccc-4475-a9ac-c05e78323d7a" providerId="AD" clId="Web-{76654120-DB18-A2CA-6924-B5895668B57D}" dt="2023-12-18T17:39:30.885" v="156" actId="1076"/>
-        <pc:sldMkLst>
-          <pc:docMk/>
-          <pc:sldMk cId="2710056737" sldId="276"/>
-        </pc:sldMkLst>
-      </pc:sldChg>
-    </pc:docChg>
-  </pc:docChgLst>
-  <pc:docChgLst>
-    <pc:chgData name="Baráth, Július" userId="aebde9b9-dccc-4475-a9ac-c05e78323d7a" providerId="ADAL" clId="{7C61A62A-BAD2-9543-99CE-B5AF4FF63417}"/>
-    <pc:docChg chg="undo custSel modSld">
-      <pc:chgData name="Baráth, Július" userId="aebde9b9-dccc-4475-a9ac-c05e78323d7a" providerId="ADAL" clId="{7C61A62A-BAD2-9543-99CE-B5AF4FF63417}" dt="2024-03-19T08:53:37.214" v="37" actId="313"/>
-      <pc:docMkLst>
-        <pc:docMk/>
-      </pc:docMkLst>
-      <pc:sldChg chg="modSp mod">
-        <pc:chgData name="Baráth, Július" userId="aebde9b9-dccc-4475-a9ac-c05e78323d7a" providerId="ADAL" clId="{7C61A62A-BAD2-9543-99CE-B5AF4FF63417}" dt="2024-03-18T12:16:04.589" v="25" actId="20577"/>
-        <pc:sldMkLst>
-          <pc:docMk/>
-          <pc:sldMk cId="0" sldId="258"/>
-        </pc:sldMkLst>
-      </pc:sldChg>
-      <pc:sldChg chg="addSp modSp mod">
-        <pc:chgData name="Baráth, Július" userId="aebde9b9-dccc-4475-a9ac-c05e78323d7a" providerId="ADAL" clId="{7C61A62A-BAD2-9543-99CE-B5AF4FF63417}" dt="2024-03-18T10:40:21.384" v="3" actId="20577"/>
-        <pc:sldMkLst>
-          <pc:docMk/>
-          <pc:sldMk cId="0" sldId="259"/>
-        </pc:sldMkLst>
-      </pc:sldChg>
-      <pc:sldChg chg="modSp mod">
-        <pc:chgData name="Baráth, Július" userId="aebde9b9-dccc-4475-a9ac-c05e78323d7a" providerId="ADAL" clId="{7C61A62A-BAD2-9543-99CE-B5AF4FF63417}" dt="2024-03-19T07:57:00.487" v="29" actId="108"/>
-        <pc:sldMkLst>
-          <pc:docMk/>
-          <pc:sldMk cId="0" sldId="263"/>
-        </pc:sldMkLst>
-      </pc:sldChg>
-      <pc:sldChg chg="modSp mod">
-        <pc:chgData name="Baráth, Július" userId="aebde9b9-dccc-4475-a9ac-c05e78323d7a" providerId="ADAL" clId="{7C61A62A-BAD2-9543-99CE-B5AF4FF63417}" dt="2024-03-19T08:53:37.214" v="37" actId="313"/>
-        <pc:sldMkLst>
-          <pc:docMk/>
-          <pc:sldMk cId="0" sldId="271"/>
-        </pc:sldMkLst>
       </pc:sldChg>
     </pc:docChg>
   </pc:docChgLst>
@@ -5816,16 +5678,10 @@
                 <a:cs typeface="Courier New"/>
                 <a:sym typeface="courier new"/>
               </a:rPr>
-              <a:t>: "[a-z]{3,}"</a:t>
-            </a:r>
-          </a:p>
-          <a:p>
-            <a:pPr rtl="0">
-              <a:lnSpc>
-                <a:spcPct val="100000"/>
-              </a:lnSpc>
-              <a:buNone/>
-            </a:pPr>
+              <a:t>: "[r-s]{1,}"</a:t>
+            </a:r>
+          </a:p>
+          <a:p>
             <a:r>
               <a:rPr lang="en-US" sz="3300" dirty="0">
                 <a:solidFill>
@@ -5848,7 +5704,7 @@
                 <a:cs typeface="Courier New"/>
                 <a:sym typeface="courier new"/>
               </a:rPr>
-              <a:t>R</a:t>
+              <a:t>Regula</a:t>
             </a:r>
             <a:r>
               <a:rPr lang="en-US" sz="3300" dirty="0">
@@ -5860,7 +5716,79 @@
                 <a:cs typeface="Courier New"/>
                 <a:sym typeface="courier new"/>
               </a:rPr>
-              <a:t>egular expressions</a:t>
+              <a:t>r</a:t>
+            </a:r>
+            <a:r>
+              <a:rPr lang="en-US" sz="3300" dirty="0">
+                <a:solidFill>
+                  <a:schemeClr val="tx1"/>
+                </a:solidFill>
+                <a:latin typeface="Courier New"/>
+                <a:ea typeface="Courier New"/>
+                <a:cs typeface="Courier New"/>
+                <a:sym typeface="courier new"/>
+              </a:rPr>
+              <a:t> exp</a:t>
+            </a:r>
+            <a:r>
+              <a:rPr lang="en-US" sz="3300" dirty="0">
+                <a:solidFill>
+                  <a:srgbClr val="FF0000"/>
+                </a:solidFill>
+                <a:latin typeface="Courier New"/>
+                <a:ea typeface="Courier New"/>
+                <a:cs typeface="Courier New"/>
+                <a:sym typeface="courier new"/>
+              </a:rPr>
+              <a:t>r</a:t>
+            </a:r>
+            <a:r>
+              <a:rPr lang="en-US" sz="3300" dirty="0">
+                <a:solidFill>
+                  <a:schemeClr val="tx1"/>
+                </a:solidFill>
+                <a:latin typeface="Courier New"/>
+                <a:ea typeface="Courier New"/>
+                <a:cs typeface="Courier New"/>
+                <a:sym typeface="courier new"/>
+              </a:rPr>
+              <a:t>e</a:t>
+            </a:r>
+            <a:r>
+              <a:rPr lang="en-US" sz="3300" dirty="0">
+                <a:solidFill>
+                  <a:srgbClr val="FF0000"/>
+                </a:solidFill>
+                <a:latin typeface="Courier New"/>
+                <a:ea typeface="Courier New"/>
+                <a:cs typeface="Courier New"/>
+                <a:sym typeface="courier new"/>
+              </a:rPr>
+              <a:t>ss</a:t>
+            </a:r>
+            <a:r>
+              <a:rPr lang="en-US" sz="3300" dirty="0">
+                <a:solidFill>
+                  <a:schemeClr val="tx1"/>
+                </a:solidFill>
+                <a:latin typeface="Courier New"/>
+                <a:ea typeface="Courier New"/>
+                <a:cs typeface="Courier New"/>
+                <a:sym typeface="courier new"/>
+              </a:rPr>
+              <a:t>ion</a:t>
+            </a:r>
+            <a:r>
+              <a:rPr lang="en-US" sz="3300" dirty="0">
+                <a:solidFill>
+                  <a:srgbClr val="FF0000"/>
+                </a:solidFill>
+                <a:latin typeface="Courier New"/>
+                <a:ea typeface="Courier New"/>
+                <a:cs typeface="Courier New"/>
+                <a:sym typeface="courier new"/>
+              </a:rPr>
+              <a:t>s</a:t>
             </a:r>
             <a:r>
               <a:rPr lang="en-US" sz="3300" dirty="0">
@@ -6849,20 +6777,8 @@
           <a:lstStyle/>
           <a:p>
             <a:r>
-              <a:rPr lang="en-US" sz="2000" dirty="0" err="1"/>
-              <a:t>egrep</a:t>
-            </a:r>
-            <a:r>
               <a:rPr lang="en-US" sz="2000" dirty="0"/>
-              <a:t> -</a:t>
-            </a:r>
-            <a:r>
-              <a:rPr lang="en-US" sz="2000" dirty="0" err="1"/>
-              <a:t>i</a:t>
-            </a:r>
-            <a:r>
-              <a:rPr lang="en-US" sz="2000" dirty="0"/>
-              <a:t> "\&lt;an" osoby.txt</a:t>
+              <a:t>grep -Ei "\&lt;an" osoby.txt</a:t>
             </a:r>
             <a:endParaRPr lang="en-US" dirty="0"/>
           </a:p>
@@ -6906,20 +6822,8 @@
           <a:lstStyle/>
           <a:p>
             <a:r>
-              <a:rPr lang="en-US" sz="2000" dirty="0" err="1"/>
-              <a:t>egrep</a:t>
-            </a:r>
-            <a:r>
               <a:rPr lang="en-US" sz="2000" dirty="0"/>
-              <a:t> -</a:t>
-            </a:r>
-            <a:r>
-              <a:rPr lang="en-US" sz="2000" dirty="0" err="1"/>
-              <a:t>i</a:t>
-            </a:r>
-            <a:r>
-              <a:rPr lang="en-US" sz="2000" dirty="0"/>
-              <a:t> "</a:t>
+              <a:t>grep -Ei "</a:t>
             </a:r>
             <a:r>
               <a:rPr lang="en-US" sz="2000" dirty="0" err="1"/>
@@ -6970,7 +6874,7 @@
         </p:blipFill>
         <p:spPr>
           <a:xfrm>
-            <a:off x="388483" y="2050997"/>
+            <a:off x="745577" y="2111127"/>
             <a:ext cx="7772400" cy="4307468"/>
           </a:xfrm>
           <a:prstGeom prst="rect">
@@ -9185,7 +9089,7 @@
               <a:buChar char="•"/>
             </a:pPr>
             <a:r>
-              <a:rPr lang="en-US" sz="3333">
+              <a:rPr lang="en-US" sz="3333" dirty="0">
                 <a:solidFill>
                   <a:srgbClr val="666666"/>
                 </a:solidFill>
@@ -9197,7 +9101,7 @@
               <a:t>\&lt;KEY</a:t>
             </a:r>
             <a:r>
-              <a:rPr lang="en-US" sz="3333">
+              <a:rPr lang="en-US" sz="3333" dirty="0">
                 <a:solidFill>
                   <a:srgbClr val="666666"/>
                 </a:solidFill>
@@ -9209,7 +9113,7 @@
               <a:t> - words beginning with </a:t>
             </a:r>
             <a:r>
-              <a:rPr lang="en-US" sz="3333">
+              <a:rPr lang="en-US" sz="3333" dirty="0">
                 <a:solidFill>
                   <a:srgbClr val="666666"/>
                 </a:solidFill>
@@ -9240,7 +9144,7 @@
               <a:buChar char="•"/>
             </a:pPr>
             <a:r>
-              <a:rPr lang="en-US" sz="3333">
+              <a:rPr lang="en-US" sz="3333" dirty="0">
                 <a:solidFill>
                   <a:srgbClr val="666666"/>
                 </a:solidFill>
@@ -9252,7 +9156,7 @@
               <a:t>KEY\&gt;</a:t>
             </a:r>
             <a:r>
-              <a:rPr lang="en-US" sz="3333">
+              <a:rPr lang="en-US" sz="3333" dirty="0">
                 <a:solidFill>
                   <a:srgbClr val="666666"/>
                 </a:solidFill>
@@ -9264,7 +9168,7 @@
               <a:t> - words ending with </a:t>
             </a:r>
             <a:r>
-              <a:rPr lang="en-US" sz="3333">
+              <a:rPr lang="en-US" sz="3333" dirty="0">
                 <a:solidFill>
                   <a:srgbClr val="666666"/>
                 </a:solidFill>
@@ -9295,7 +9199,7 @@
               <a:buChar char="•"/>
             </a:pPr>
             <a:r>
-              <a:rPr lang="en-US" sz="3333">
+              <a:rPr lang="en-US" sz="3333" dirty="0">
                 <a:solidFill>
                   <a:srgbClr val="666666"/>
                 </a:solidFill>
@@ -9307,7 +9211,7 @@
               <a:t>^</a:t>
             </a:r>
             <a:r>
-              <a:rPr lang="en-US" sz="3333">
+              <a:rPr lang="en-US" sz="3333" dirty="0">
                 <a:solidFill>
                   <a:srgbClr val="666666"/>
                 </a:solidFill>
@@ -9338,7 +9242,7 @@
               <a:buChar char="•"/>
             </a:pPr>
             <a:r>
-              <a:rPr lang="en-US" sz="3333">
+              <a:rPr lang="en-US" sz="3333" dirty="0">
                 <a:solidFill>
                   <a:srgbClr val="666666"/>
                 </a:solidFill>
@@ -9350,7 +9254,7 @@
               <a:t>$</a:t>
             </a:r>
             <a:r>
-              <a:rPr lang="en-US" sz="3333">
+              <a:rPr lang="en-US" sz="3333" dirty="0">
                 <a:solidFill>
                   <a:srgbClr val="666666"/>
                 </a:solidFill>
@@ -9381,7 +9285,7 @@
               <a:buChar char="•"/>
             </a:pPr>
             <a:r>
-              <a:rPr lang="en-US" sz="3333">
+              <a:rPr lang="en-US" sz="3333" dirty="0">
                 <a:solidFill>
                   <a:srgbClr val="666666"/>
                 </a:solidFill>
@@ -9393,7 +9297,7 @@
               <a:t>\X</a:t>
             </a:r>
             <a:r>
-              <a:rPr lang="en-US" sz="3333">
+              <a:rPr lang="en-US" sz="3333" dirty="0">
                 <a:solidFill>
                   <a:srgbClr val="666666"/>
                 </a:solidFill>
@@ -9405,7 +9309,7 @@
               <a:t> - match special character </a:t>
             </a:r>
             <a:r>
-              <a:rPr lang="en-US" sz="3333">
+              <a:rPr lang="en-US" sz="3333" dirty="0">
                 <a:solidFill>
                   <a:srgbClr val="666666"/>
                 </a:solidFill>
@@ -9436,7 +9340,7 @@
               <a:buChar char="o"/>
             </a:pPr>
             <a:r>
-              <a:rPr lang="en-US" sz="3333">
+              <a:rPr lang="en-US" sz="3333" dirty="0">
                 <a:solidFill>
                   <a:srgbClr val="666666"/>
                 </a:solidFill>
@@ -9448,7 +9352,7 @@
               <a:t>escaping</a:t>
             </a:r>
             <a:r>
-              <a:rPr lang="en-US" sz="3333">
+              <a:rPr lang="en-US" sz="3333" dirty="0">
                 <a:solidFill>
                   <a:srgbClr val="666666"/>
                 </a:solidFill>
@@ -9479,7 +9383,7 @@
               <a:buChar char="•"/>
             </a:pPr>
             <a:r>
-              <a:rPr lang="en-US" sz="3333">
+              <a:rPr lang="en-US" sz="3333" dirty="0">
                 <a:solidFill>
                   <a:srgbClr val="666666"/>
                 </a:solidFill>
@@ -9491,7 +9395,7 @@
               <a:t>.</a:t>
             </a:r>
             <a:r>
-              <a:rPr lang="en-US" sz="3333">
+              <a:rPr lang="en-US" sz="3333" dirty="0">
                 <a:solidFill>
                   <a:srgbClr val="666666"/>
                 </a:solidFill>
@@ -10491,7 +10395,7 @@
                 <a:cs typeface="Courier New"/>
                 <a:sym typeface="courier new"/>
               </a:rPr>
-              <a:t>"[or][wu]" -&gt; "H</a:t>
+              <a:t>"[o][wu]" -&gt; "H</a:t>
             </a:r>
             <a:r>
               <a:rPr lang="en-US" sz="3300" b="0" dirty="0">
